--- a/Proyecto_Artistico_Sustentable_Compost_gotchi.pptx
+++ b/Proyecto_Artistico_Sustentable_Compost_gotchi.pptx
@@ -5153,6 +5153,13 @@
               <a:schemeClr val="lt1"/>
             </a:fontRef>
           </p:style>
+          <p:txBody>
+            <a:bodyPr/>
+            <a:lstStyle/>
+            <a:p>
+              <a:endParaRPr lang="es-PE"/>
+            </a:p>
+          </p:txBody>
         </p:sp>
         <p:pic>
           <p:nvPicPr>
